--- a/data-eng/decks/w3d5s3.pptx
+++ b/data-eng/decks/w3d5s3.pptx
@@ -3100,7 +3100,7 @@
       <p:grpSpPr/>
       <p:sp>
         <p:nvSpPr>
-          <p:cNvPr id="2" name="Oval 1"/>
+          <p:cNvPr id="2" name="deckgen:decor"/>
           <p:cNvSpPr/>
           <p:nvPr/>
         </p:nvSpPr>
@@ -3130,7 +3130,7 @@
       </p:sp>
       <p:sp>
         <p:nvSpPr>
-          <p:cNvPr id="3" name="Oval 2"/>
+          <p:cNvPr id="3" name="deckgen:decor"/>
           <p:cNvSpPr/>
           <p:nvPr/>
         </p:nvSpPr>
@@ -3160,7 +3160,7 @@
       </p:sp>
       <p:sp>
         <p:nvSpPr>
-          <p:cNvPr id="4" name="Oval 3"/>
+          <p:cNvPr id="4" name="deckgen:decor"/>
           <p:cNvSpPr/>
           <p:nvPr/>
         </p:nvSpPr>
@@ -3190,7 +3190,7 @@
       </p:sp>
       <p:sp>
         <p:nvSpPr>
-          <p:cNvPr id="5" name="Rectangle 4"/>
+          <p:cNvPr id="5" name="deckgen:decor"/>
           <p:cNvSpPr/>
           <p:nvPr/>
         </p:nvSpPr>
@@ -3220,7 +3220,7 @@
       </p:sp>
       <p:sp>
         <p:nvSpPr>
-          <p:cNvPr id="6" name="Oval 5"/>
+          <p:cNvPr id="6" name="deckgen:decor"/>
           <p:cNvSpPr/>
           <p:nvPr/>
         </p:nvSpPr>
@@ -3250,7 +3250,7 @@
       </p:sp>
       <p:sp>
         <p:nvSpPr>
-          <p:cNvPr id="7" name="Oval 6"/>
+          <p:cNvPr id="7" name="deckgen:decor"/>
           <p:cNvSpPr/>
           <p:nvPr/>
         </p:nvSpPr>
@@ -3280,7 +3280,7 @@
       </p:sp>
       <p:sp>
         <p:nvSpPr>
-          <p:cNvPr id="8" name="Oval 7"/>
+          <p:cNvPr id="8" name="deckgen:decor"/>
           <p:cNvSpPr/>
           <p:nvPr/>
         </p:nvSpPr>
@@ -3310,7 +3310,7 @@
       </p:sp>
       <p:sp>
         <p:nvSpPr>
-          <p:cNvPr id="9" name="Oval 8"/>
+          <p:cNvPr id="9" name="deckgen:decor"/>
           <p:cNvSpPr/>
           <p:nvPr/>
         </p:nvSpPr>
@@ -3340,7 +3340,7 @@
       </p:sp>
       <p:sp>
         <p:nvSpPr>
-          <p:cNvPr id="10" name="Rectangle 9"/>
+          <p:cNvPr id="10" name="deckgen:decor"/>
           <p:cNvSpPr/>
           <p:nvPr/>
         </p:nvSpPr>
@@ -3618,7 +3618,7 @@
       <p:grpSpPr/>
       <p:sp>
         <p:nvSpPr>
-          <p:cNvPr id="2" name="Oval 1"/>
+          <p:cNvPr id="2" name="deckgen:decor"/>
           <p:cNvSpPr/>
           <p:nvPr/>
         </p:nvSpPr>
@@ -3648,7 +3648,7 @@
       </p:sp>
       <p:sp>
         <p:nvSpPr>
-          <p:cNvPr id="3" name="Oval 2"/>
+          <p:cNvPr id="3" name="deckgen:decor"/>
           <p:cNvSpPr/>
           <p:nvPr/>
         </p:nvSpPr>
@@ -3678,7 +3678,7 @@
       </p:sp>
       <p:sp>
         <p:nvSpPr>
-          <p:cNvPr id="4" name="Oval 3"/>
+          <p:cNvPr id="4" name="deckgen:decor"/>
           <p:cNvSpPr/>
           <p:nvPr/>
         </p:nvSpPr>
@@ -3959,7 +3959,7 @@
                 <a:ea typeface="Pretendard"/>
                 <a:cs typeface="Pretendard"/>
               </a:rPr>
-              <a:t>quality_report.csv 의 after 행: 중복 0 · 결측 0 · 카테고리 4</a:t>
+              <a:t>after 행이 1000 · 0 · 0 · 0.00 · 4</a:t>
             </a:r>
           </a:p>
         </p:txBody>
@@ -4105,7 +4105,7 @@
                 <a:ea typeface="Pretendard"/>
                 <a:cs typeface="Pretendard"/>
               </a:rPr>
-              <a:t>before 행이 원본 기준선(1015 · 15 · 30+)과 같다</a:t>
+              <a:t>before 행이 기준선 1015 · 15 · 30 · 2.96 · 5 와 같다</a:t>
             </a:r>
           </a:p>
         </p:txBody>
@@ -4543,7 +4543,7 @@
                 <a:ea typeface="Pretendard"/>
                 <a:cs typeface="Pretendard"/>
               </a:rPr>
-              <a:t>지우고 스크립트만으로 재현된 뒤 3종을 제출했다</a:t>
+              <a:t>지우고 재현한 뒤 3종을 제출했다 (10-16 23:59)</a:t>
             </a:r>
           </a:p>
         </p:txBody>
@@ -4680,7 +4680,7 @@
       <p:grpSpPr/>
       <p:sp>
         <p:nvSpPr>
-          <p:cNvPr id="2" name="Oval 1"/>
+          <p:cNvPr id="2" name="deckgen:decor"/>
           <p:cNvSpPr/>
           <p:nvPr/>
         </p:nvSpPr>
@@ -4710,7 +4710,7 @@
       </p:sp>
       <p:sp>
         <p:nvSpPr>
-          <p:cNvPr id="3" name="Oval 2"/>
+          <p:cNvPr id="3" name="deckgen:decor"/>
           <p:cNvSpPr/>
           <p:nvPr/>
         </p:nvSpPr>
@@ -5350,7 +5350,7 @@
                 <a:ea typeface="Pretendard"/>
                 <a:cs typeface="Pretendard"/>
               </a:rPr>
-              <a:t>4-1 MinIO 오브젝트 스토리지 예고</a:t>
+              <a:t>4-1 예고 — 도커 다시 켜기 · 이미지 받기</a:t>
             </a:r>
           </a:p>
         </p:txBody>
@@ -5462,7 +5462,7 @@
                 <a:ea typeface="Pretendard"/>
                 <a:cs typeface="Pretendard"/>
               </a:rPr>
-              <a:t>제출 페이지에 3종이 올라갔는지</a:t>
+              <a:t>URL 칸에 주소 · 패들릿에 zip</a:t>
             </a:r>
           </a:p>
         </p:txBody>
@@ -5487,7 +5487,7 @@
       <p:grpSpPr/>
       <p:sp>
         <p:nvSpPr>
-          <p:cNvPr id="2" name="Oval 1"/>
+          <p:cNvPr id="2" name="deckgen:decor"/>
           <p:cNvSpPr/>
           <p:nvPr/>
         </p:nvSpPr>
@@ -5517,7 +5517,7 @@
       </p:sp>
       <p:sp>
         <p:nvSpPr>
-          <p:cNvPr id="3" name="Oval 2"/>
+          <p:cNvPr id="3" name="deckgen:decor"/>
           <p:cNvSpPr/>
           <p:nvPr/>
         </p:nvSpPr>
@@ -5547,7 +5547,7 @@
       </p:sp>
       <p:sp>
         <p:nvSpPr>
-          <p:cNvPr id="4" name="Oval 3"/>
+          <p:cNvPr id="4" name="deckgen:decor"/>
           <p:cNvSpPr/>
           <p:nvPr/>
         </p:nvSpPr>
@@ -6341,7 +6341,7 @@
                 <a:ea typeface="Pretendard"/>
                 <a:cs typeface="Pretendard"/>
               </a:rPr>
-              <a:t>이 챕터의 결과물이 3주차 산출물입니다 — 품질 리포트 + orders_clean.parquet</a:t>
+              <a:t>이 챕터의 결과물이 3주차 산출물 3종 — 마감 10-16(금) 23:59</a:t>
             </a:r>
           </a:p>
         </p:txBody>
@@ -6478,7 +6478,7 @@
       <p:grpSpPr/>
       <p:sp>
         <p:nvSpPr>
-          <p:cNvPr id="2" name="Oval 1"/>
+          <p:cNvPr id="2" name="deckgen:decor"/>
           <p:cNvSpPr/>
           <p:nvPr/>
         </p:nvSpPr>
@@ -6508,7 +6508,7 @@
       </p:sp>
       <p:sp>
         <p:nvSpPr>
-          <p:cNvPr id="3" name="Oval 2"/>
+          <p:cNvPr id="3" name="deckgen:decor"/>
           <p:cNvSpPr/>
           <p:nvPr/>
         </p:nvSpPr>
@@ -6538,7 +6538,7 @@
       </p:sp>
       <p:sp>
         <p:nvSpPr>
-          <p:cNvPr id="4" name="Oval 3"/>
+          <p:cNvPr id="4" name="deckgen:decor"/>
           <p:cNvSpPr/>
           <p:nvPr/>
         </p:nvSpPr>
@@ -7671,7 +7671,7 @@
       <p:grpSpPr/>
       <p:sp>
         <p:nvSpPr>
-          <p:cNvPr id="2" name="Oval 1"/>
+          <p:cNvPr id="2" name="deckgen:decor"/>
           <p:cNvSpPr/>
           <p:nvPr/>
         </p:nvSpPr>
@@ -7701,7 +7701,7 @@
       </p:sp>
       <p:sp>
         <p:nvSpPr>
-          <p:cNvPr id="3" name="Oval 2"/>
+          <p:cNvPr id="3" name="deckgen:decor"/>
           <p:cNvSpPr/>
           <p:nvPr/>
         </p:nvSpPr>
@@ -7731,7 +7731,7 @@
       </p:sp>
       <p:sp>
         <p:nvSpPr>
-          <p:cNvPr id="4" name="Oval 3"/>
+          <p:cNvPr id="4" name="deckgen:decor"/>
           <p:cNvSpPr/>
           <p:nvPr/>
         </p:nvSpPr>
@@ -7880,7 +7880,7 @@
         <p:spPr>
           <a:xfrm>
             <a:off x="1143000" y="2781300"/>
-            <a:ext cx="5082540" cy="590550"/>
+            <a:ext cx="4762500" cy="590550"/>
           </a:xfrm>
           <a:prstGeom prst="rect">
             <a:avLst/>
@@ -7910,7 +7910,7 @@
         <p:spPr>
           <a:xfrm>
             <a:off x="1143000" y="2781300"/>
-            <a:ext cx="5082540" cy="590550"/>
+            <a:ext cx="4762500" cy="590550"/>
           </a:xfrm>
           <a:prstGeom prst="rect">
             <a:avLst/>
@@ -7950,8 +7950,8 @@
         </p:nvSpPr>
         <p:spPr>
           <a:xfrm>
-            <a:off x="6263640" y="2781300"/>
-            <a:ext cx="6842760" cy="590550"/>
+            <a:off x="5943600" y="2781300"/>
+            <a:ext cx="6362700" cy="590550"/>
           </a:xfrm>
           <a:prstGeom prst="rect">
             <a:avLst/>
@@ -7980,8 +7980,8 @@
         </p:nvSpPr>
         <p:spPr>
           <a:xfrm>
-            <a:off x="6263640" y="2781300"/>
-            <a:ext cx="6842760" cy="590550"/>
+            <a:off x="5943600" y="2781300"/>
+            <a:ext cx="6362700" cy="590550"/>
           </a:xfrm>
           <a:prstGeom prst="rect">
             <a:avLst/>
@@ -8021,8 +8021,8 @@
         </p:nvSpPr>
         <p:spPr>
           <a:xfrm>
-            <a:off x="13144500" y="2781300"/>
-            <a:ext cx="4000500" cy="590550"/>
+            <a:off x="12344400" y="2781300"/>
+            <a:ext cx="2362200" cy="590550"/>
           </a:xfrm>
           <a:prstGeom prst="rect">
             <a:avLst/>
@@ -8051,8 +8051,8 @@
         </p:nvSpPr>
         <p:spPr>
           <a:xfrm>
-            <a:off x="13144500" y="2781300"/>
-            <a:ext cx="4000500" cy="590550"/>
+            <a:off x="12344400" y="2781300"/>
+            <a:ext cx="2362200" cy="590550"/>
           </a:xfrm>
           <a:prstGeom prst="rect">
             <a:avLst/>
@@ -8079,21 +8079,92 @@
                 <a:ea typeface="Pretendard"/>
                 <a:cs typeface="Pretendard"/>
               </a:rPr>
-              <a:t>after 기대값</a:t>
-            </a:r>
-          </a:p>
-        </p:txBody>
-      </p:sp>
-      <p:sp>
-        <p:nvSpPr>
-          <p:cNvPr id="14" name="Rounded Rectangle 13"/>
+              <a:t>before</a:t>
+            </a:r>
+          </a:p>
+        </p:txBody>
+      </p:sp>
+      <p:sp>
+        <p:nvSpPr>
+          <p:cNvPr id="14" name="Rectangle 13"/>
+          <p:cNvSpPr/>
+          <p:nvPr/>
+        </p:nvSpPr>
+        <p:spPr>
+          <a:xfrm>
+            <a:off x="14744700" y="2781300"/>
+            <a:ext cx="2400300" cy="590550"/>
+          </a:xfrm>
+          <a:prstGeom prst="rect">
+            <a:avLst/>
+          </a:prstGeom>
+          <a:solidFill>
+            <a:srgbClr val="1E5BC6"/>
+          </a:solidFill>
+          <a:ln>
+            <a:noFill/>
+          </a:ln>
+          <a:effectLst/>
+        </p:spPr>
+        <p:txBody>
+          <a:bodyPr rtlCol="0" anchor="ctr" wrap="square"/>
+          <a:lstStyle/>
+          <a:p>
+            <a:pPr algn="ctr"/>
+          </a:p>
+        </p:txBody>
+      </p:sp>
+      <p:sp>
+        <p:nvSpPr>
+          <p:cNvPr id="15" name="TextBox 14"/>
+          <p:cNvSpPr txBox="1"/>
+          <p:nvPr/>
+        </p:nvSpPr>
+        <p:spPr>
+          <a:xfrm>
+            <a:off x="14744700" y="2781300"/>
+            <a:ext cx="2400300" cy="590550"/>
+          </a:xfrm>
+          <a:prstGeom prst="rect">
+            <a:avLst/>
+          </a:prstGeom>
+          <a:noFill/>
+        </p:spPr>
+        <p:txBody>
+          <a:bodyPr wrap="square" lIns="0" rIns="0" tIns="0" bIns="0" anchor="ctr">
+            <a:spAutoFit/>
+          </a:bodyPr>
+          <a:lstStyle/>
+          <a:p>
+            <a:pPr algn="ctr">
+              <a:lnSpc>
+                <a:spcPct val="100000"/>
+              </a:lnSpc>
+            </a:pPr>
+            <a:r>
+              <a:rPr sz="2025" b="1">
+                <a:solidFill>
+                  <a:srgbClr val="FFFFFF"/>
+                </a:solidFill>
+                <a:latin typeface="Pretendard"/>
+                <a:ea typeface="Pretendard"/>
+                <a:cs typeface="Pretendard"/>
+              </a:rPr>
+              <a:t>after</a:t>
+            </a:r>
+          </a:p>
+        </p:txBody>
+      </p:sp>
+      <p:sp>
+        <p:nvSpPr>
+          <p:cNvPr id="16" name="Rounded Rectangle 15"/>
           <p:cNvSpPr/>
           <p:nvPr/>
         </p:nvSpPr>
         <p:spPr>
           <a:xfrm>
             <a:off x="1143000" y="3448050"/>
-            <a:ext cx="5082540" cy="647700"/>
+            <a:ext cx="4762500" cy="647700"/>
           </a:xfrm>
           <a:prstGeom prst="roundRect">
             <a:avLst>
@@ -8120,14 +8191,14 @@
       </p:sp>
       <p:sp>
         <p:nvSpPr>
-          <p:cNvPr id="15" name="TextBox 14"/>
+          <p:cNvPr id="17" name="TextBox 16"/>
           <p:cNvSpPr txBox="1"/>
           <p:nvPr/>
         </p:nvSpPr>
         <p:spPr>
           <a:xfrm>
             <a:off x="1238250" y="3448050"/>
-            <a:ext cx="4892040" cy="647700"/>
+            <a:ext cx="4572000" cy="647700"/>
           </a:xfrm>
           <a:prstGeom prst="rect">
             <a:avLst/>
@@ -8161,14 +8232,14 @@
       </p:sp>
       <p:sp>
         <p:nvSpPr>
-          <p:cNvPr id="16" name="Rounded Rectangle 15"/>
-          <p:cNvSpPr/>
-          <p:nvPr/>
-        </p:nvSpPr>
-        <p:spPr>
-          <a:xfrm>
-            <a:off x="6263640" y="3448050"/>
-            <a:ext cx="6842760" cy="647700"/>
+          <p:cNvPr id="18" name="Rounded Rectangle 17"/>
+          <p:cNvSpPr/>
+          <p:nvPr/>
+        </p:nvSpPr>
+        <p:spPr>
+          <a:xfrm>
+            <a:off x="5943600" y="3448050"/>
+            <a:ext cx="6362700" cy="647700"/>
           </a:xfrm>
           <a:prstGeom prst="roundRect">
             <a:avLst>
@@ -8195,14 +8266,14 @@
       </p:sp>
       <p:sp>
         <p:nvSpPr>
-          <p:cNvPr id="17" name="TextBox 16"/>
-          <p:cNvSpPr txBox="1"/>
-          <p:nvPr/>
-        </p:nvSpPr>
-        <p:spPr>
-          <a:xfrm>
-            <a:off x="6358890" y="3448050"/>
-            <a:ext cx="6652260" cy="647700"/>
+          <p:cNvPr id="19" name="TextBox 18"/>
+          <p:cNvSpPr txBox="1"/>
+          <p:nvPr/>
+        </p:nvSpPr>
+        <p:spPr>
+          <a:xfrm>
+            <a:off x="6038850" y="3448050"/>
+            <a:ext cx="6172200" cy="647700"/>
           </a:xfrm>
           <a:prstGeom prst="rect">
             <a:avLst/>
@@ -8236,14 +8307,14 @@
       </p:sp>
       <p:sp>
         <p:nvSpPr>
-          <p:cNvPr id="18" name="Rounded Rectangle 17"/>
-          <p:cNvSpPr/>
-          <p:nvPr/>
-        </p:nvSpPr>
-        <p:spPr>
-          <a:xfrm>
-            <a:off x="13144500" y="3448050"/>
-            <a:ext cx="4000500" cy="647700"/>
+          <p:cNvPr id="20" name="Rounded Rectangle 19"/>
+          <p:cNvSpPr/>
+          <p:nvPr/>
+        </p:nvSpPr>
+        <p:spPr>
+          <a:xfrm>
+            <a:off x="12344400" y="3448050"/>
+            <a:ext cx="2362200" cy="647700"/>
           </a:xfrm>
           <a:prstGeom prst="roundRect">
             <a:avLst>
@@ -8270,14 +8341,14 @@
       </p:sp>
       <p:sp>
         <p:nvSpPr>
-          <p:cNvPr id="19" name="TextBox 18"/>
-          <p:cNvSpPr txBox="1"/>
-          <p:nvPr/>
-        </p:nvSpPr>
-        <p:spPr>
-          <a:xfrm>
-            <a:off x="13239750" y="3448050"/>
-            <a:ext cx="3810000" cy="647700"/>
+          <p:cNvPr id="21" name="TextBox 20"/>
+          <p:cNvSpPr txBox="1"/>
+          <p:nvPr/>
+        </p:nvSpPr>
+        <p:spPr>
+          <a:xfrm>
+            <a:off x="12439650" y="3448050"/>
+            <a:ext cx="2171700" cy="647700"/>
           </a:xfrm>
           <a:prstGeom prst="rect">
             <a:avLst/>
@@ -8304,21 +8375,21 @@
                 <a:ea typeface="Pretendard"/>
                 <a:cs typeface="Pretendard"/>
               </a:rPr>
-              <a:t>1000</a:t>
-            </a:r>
-          </a:p>
-        </p:txBody>
-      </p:sp>
-      <p:sp>
-        <p:nvSpPr>
-          <p:cNvPr id="20" name="Rounded Rectangle 19"/>
-          <p:cNvSpPr/>
-          <p:nvPr/>
-        </p:nvSpPr>
-        <p:spPr>
-          <a:xfrm>
-            <a:off x="1143000" y="4171950"/>
-            <a:ext cx="5082540" cy="647700"/>
+              <a:t>1015</a:t>
+            </a:r>
+          </a:p>
+        </p:txBody>
+      </p:sp>
+      <p:sp>
+        <p:nvSpPr>
+          <p:cNvPr id="22" name="Rounded Rectangle 21"/>
+          <p:cNvSpPr/>
+          <p:nvPr/>
+        </p:nvSpPr>
+        <p:spPr>
+          <a:xfrm>
+            <a:off x="14744700" y="3448050"/>
+            <a:ext cx="2400300" cy="647700"/>
           </a:xfrm>
           <a:prstGeom prst="roundRect">
             <a:avLst>
@@ -8326,6 +8397,81 @@
             </a:avLst>
           </a:prstGeom>
           <a:solidFill>
+            <a:srgbClr val="FAFBFD"/>
+          </a:solidFill>
+          <a:ln w="9525">
+            <a:solidFill>
+              <a:srgbClr val="DCE1E8"/>
+            </a:solidFill>
+          </a:ln>
+          <a:effectLst/>
+        </p:spPr>
+        <p:txBody>
+          <a:bodyPr rtlCol="0" anchor="ctr" wrap="square"/>
+          <a:lstStyle/>
+          <a:p>
+            <a:pPr algn="ctr"/>
+          </a:p>
+        </p:txBody>
+      </p:sp>
+      <p:sp>
+        <p:nvSpPr>
+          <p:cNvPr id="23" name="TextBox 22"/>
+          <p:cNvSpPr txBox="1"/>
+          <p:nvPr/>
+        </p:nvSpPr>
+        <p:spPr>
+          <a:xfrm>
+            <a:off x="14839950" y="3448050"/>
+            <a:ext cx="2209800" cy="647700"/>
+          </a:xfrm>
+          <a:prstGeom prst="rect">
+            <a:avLst/>
+          </a:prstGeom>
+          <a:noFill/>
+        </p:spPr>
+        <p:txBody>
+          <a:bodyPr wrap="square" lIns="0" rIns="0" tIns="0" bIns="0" anchor="ctr">
+            <a:spAutoFit/>
+          </a:bodyPr>
+          <a:lstStyle/>
+          <a:p>
+            <a:pPr algn="ctr">
+              <a:lnSpc>
+                <a:spcPct val="115000"/>
+              </a:lnSpc>
+            </a:pPr>
+            <a:r>
+              <a:rPr sz="1875" b="0">
+                <a:solidFill>
+                  <a:srgbClr val="3D3D3D"/>
+                </a:solidFill>
+                <a:latin typeface="Pretendard"/>
+                <a:ea typeface="Pretendard"/>
+                <a:cs typeface="Pretendard"/>
+              </a:rPr>
+              <a:t>1000</a:t>
+            </a:r>
+          </a:p>
+        </p:txBody>
+      </p:sp>
+      <p:sp>
+        <p:nvSpPr>
+          <p:cNvPr id="24" name="Rounded Rectangle 23"/>
+          <p:cNvSpPr/>
+          <p:nvPr/>
+        </p:nvSpPr>
+        <p:spPr>
+          <a:xfrm>
+            <a:off x="1143000" y="4171950"/>
+            <a:ext cx="4762500" cy="647700"/>
+          </a:xfrm>
+          <a:prstGeom prst="roundRect">
+            <a:avLst>
+              <a:gd name="adj" fmla="val 5882"/>
+            </a:avLst>
+          </a:prstGeom>
+          <a:solidFill>
             <a:srgbClr val="EDF3FD"/>
           </a:solidFill>
           <a:ln w="9525">
@@ -8345,14 +8491,14 @@
       </p:sp>
       <p:sp>
         <p:nvSpPr>
-          <p:cNvPr id="21" name="TextBox 20"/>
+          <p:cNvPr id="25" name="TextBox 24"/>
           <p:cNvSpPr txBox="1"/>
           <p:nvPr/>
         </p:nvSpPr>
         <p:spPr>
           <a:xfrm>
             <a:off x="1238250" y="4171950"/>
-            <a:ext cx="4892040" cy="647700"/>
+            <a:ext cx="4572000" cy="647700"/>
           </a:xfrm>
           <a:prstGeom prst="rect">
             <a:avLst/>
@@ -8386,14 +8532,14 @@
       </p:sp>
       <p:sp>
         <p:nvSpPr>
-          <p:cNvPr id="22" name="Rounded Rectangle 21"/>
-          <p:cNvSpPr/>
-          <p:nvPr/>
-        </p:nvSpPr>
-        <p:spPr>
-          <a:xfrm>
-            <a:off x="6263640" y="4171950"/>
-            <a:ext cx="6842760" cy="647700"/>
+          <p:cNvPr id="26" name="Rounded Rectangle 25"/>
+          <p:cNvSpPr/>
+          <p:nvPr/>
+        </p:nvSpPr>
+        <p:spPr>
+          <a:xfrm>
+            <a:off x="5943600" y="4171950"/>
+            <a:ext cx="6362700" cy="647700"/>
           </a:xfrm>
           <a:prstGeom prst="roundRect">
             <a:avLst>
@@ -8420,14 +8566,14 @@
       </p:sp>
       <p:sp>
         <p:nvSpPr>
-          <p:cNvPr id="23" name="TextBox 22"/>
-          <p:cNvSpPr txBox="1"/>
-          <p:nvPr/>
-        </p:nvSpPr>
-        <p:spPr>
-          <a:xfrm>
-            <a:off x="6358890" y="4171950"/>
-            <a:ext cx="6652260" cy="647700"/>
+          <p:cNvPr id="27" name="TextBox 26"/>
+          <p:cNvSpPr txBox="1"/>
+          <p:nvPr/>
+        </p:nvSpPr>
+        <p:spPr>
+          <a:xfrm>
+            <a:off x="6038850" y="4171950"/>
+            <a:ext cx="6172200" cy="647700"/>
           </a:xfrm>
           <a:prstGeom prst="rect">
             <a:avLst/>
@@ -8461,14 +8607,14 @@
       </p:sp>
       <p:sp>
         <p:nvSpPr>
-          <p:cNvPr id="24" name="Rounded Rectangle 23"/>
-          <p:cNvSpPr/>
-          <p:nvPr/>
-        </p:nvSpPr>
-        <p:spPr>
-          <a:xfrm>
-            <a:off x="13144500" y="4171950"/>
-            <a:ext cx="4000500" cy="647700"/>
+          <p:cNvPr id="28" name="Rounded Rectangle 27"/>
+          <p:cNvSpPr/>
+          <p:nvPr/>
+        </p:nvSpPr>
+        <p:spPr>
+          <a:xfrm>
+            <a:off x="12344400" y="4171950"/>
+            <a:ext cx="2362200" cy="647700"/>
           </a:xfrm>
           <a:prstGeom prst="roundRect">
             <a:avLst>
@@ -8495,14 +8641,14 @@
       </p:sp>
       <p:sp>
         <p:nvSpPr>
-          <p:cNvPr id="25" name="TextBox 24"/>
-          <p:cNvSpPr txBox="1"/>
-          <p:nvPr/>
-        </p:nvSpPr>
-        <p:spPr>
-          <a:xfrm>
-            <a:off x="13239750" y="4171950"/>
-            <a:ext cx="3810000" cy="647700"/>
+          <p:cNvPr id="29" name="TextBox 28"/>
+          <p:cNvSpPr txBox="1"/>
+          <p:nvPr/>
+        </p:nvSpPr>
+        <p:spPr>
+          <a:xfrm>
+            <a:off x="12439650" y="4171950"/>
+            <a:ext cx="2171700" cy="647700"/>
           </a:xfrm>
           <a:prstGeom prst="rect">
             <a:avLst/>
@@ -8529,21 +8675,21 @@
                 <a:ea typeface="Pretendard"/>
                 <a:cs typeface="Pretendard"/>
               </a:rPr>
-              <a:t>0</a:t>
-            </a:r>
-          </a:p>
-        </p:txBody>
-      </p:sp>
-      <p:sp>
-        <p:nvSpPr>
-          <p:cNvPr id="26" name="Rounded Rectangle 25"/>
-          <p:cNvSpPr/>
-          <p:nvPr/>
-        </p:nvSpPr>
-        <p:spPr>
-          <a:xfrm>
-            <a:off x="1143000" y="4895850"/>
-            <a:ext cx="5082540" cy="647700"/>
+              <a:t>15</a:t>
+            </a:r>
+          </a:p>
+        </p:txBody>
+      </p:sp>
+      <p:sp>
+        <p:nvSpPr>
+          <p:cNvPr id="30" name="Rounded Rectangle 29"/>
+          <p:cNvSpPr/>
+          <p:nvPr/>
+        </p:nvSpPr>
+        <p:spPr>
+          <a:xfrm>
+            <a:off x="14744700" y="4171950"/>
+            <a:ext cx="2400300" cy="647700"/>
           </a:xfrm>
           <a:prstGeom prst="roundRect">
             <a:avLst>
@@ -8551,6 +8697,81 @@
             </a:avLst>
           </a:prstGeom>
           <a:solidFill>
+            <a:srgbClr val="FAFBFD"/>
+          </a:solidFill>
+          <a:ln w="9525">
+            <a:solidFill>
+              <a:srgbClr val="DCE1E8"/>
+            </a:solidFill>
+          </a:ln>
+          <a:effectLst/>
+        </p:spPr>
+        <p:txBody>
+          <a:bodyPr rtlCol="0" anchor="ctr" wrap="square"/>
+          <a:lstStyle/>
+          <a:p>
+            <a:pPr algn="ctr"/>
+          </a:p>
+        </p:txBody>
+      </p:sp>
+      <p:sp>
+        <p:nvSpPr>
+          <p:cNvPr id="31" name="TextBox 30"/>
+          <p:cNvSpPr txBox="1"/>
+          <p:nvPr/>
+        </p:nvSpPr>
+        <p:spPr>
+          <a:xfrm>
+            <a:off x="14839950" y="4171950"/>
+            <a:ext cx="2209800" cy="647700"/>
+          </a:xfrm>
+          <a:prstGeom prst="rect">
+            <a:avLst/>
+          </a:prstGeom>
+          <a:noFill/>
+        </p:spPr>
+        <p:txBody>
+          <a:bodyPr wrap="square" lIns="0" rIns="0" tIns="0" bIns="0" anchor="ctr">
+            <a:spAutoFit/>
+          </a:bodyPr>
+          <a:lstStyle/>
+          <a:p>
+            <a:pPr algn="ctr">
+              <a:lnSpc>
+                <a:spcPct val="115000"/>
+              </a:lnSpc>
+            </a:pPr>
+            <a:r>
+              <a:rPr sz="1875" b="0">
+                <a:solidFill>
+                  <a:srgbClr val="3D3D3D"/>
+                </a:solidFill>
+                <a:latin typeface="Pretendard"/>
+                <a:ea typeface="Pretendard"/>
+                <a:cs typeface="Pretendard"/>
+              </a:rPr>
+              <a:t>0</a:t>
+            </a:r>
+          </a:p>
+        </p:txBody>
+      </p:sp>
+      <p:sp>
+        <p:nvSpPr>
+          <p:cNvPr id="32" name="Rounded Rectangle 31"/>
+          <p:cNvSpPr/>
+          <p:nvPr/>
+        </p:nvSpPr>
+        <p:spPr>
+          <a:xfrm>
+            <a:off x="1143000" y="4895850"/>
+            <a:ext cx="4762500" cy="647700"/>
+          </a:xfrm>
+          <a:prstGeom prst="roundRect">
+            <a:avLst>
+              <a:gd name="adj" fmla="val 5882"/>
+            </a:avLst>
+          </a:prstGeom>
+          <a:solidFill>
             <a:srgbClr val="EDF3FD"/>
           </a:solidFill>
           <a:ln w="9525">
@@ -8570,14 +8791,14 @@
       </p:sp>
       <p:sp>
         <p:nvSpPr>
-          <p:cNvPr id="27" name="TextBox 26"/>
+          <p:cNvPr id="33" name="TextBox 32"/>
           <p:cNvSpPr txBox="1"/>
           <p:nvPr/>
         </p:nvSpPr>
         <p:spPr>
           <a:xfrm>
             <a:off x="1238250" y="4895850"/>
-            <a:ext cx="4892040" cy="647700"/>
+            <a:ext cx="4572000" cy="647700"/>
           </a:xfrm>
           <a:prstGeom prst="rect">
             <a:avLst/>
@@ -8611,14 +8832,14 @@
       </p:sp>
       <p:sp>
         <p:nvSpPr>
-          <p:cNvPr id="28" name="Rounded Rectangle 27"/>
-          <p:cNvSpPr/>
-          <p:nvPr/>
-        </p:nvSpPr>
-        <p:spPr>
-          <a:xfrm>
-            <a:off x="6263640" y="4895850"/>
-            <a:ext cx="6842760" cy="647700"/>
+          <p:cNvPr id="34" name="Rounded Rectangle 33"/>
+          <p:cNvSpPr/>
+          <p:nvPr/>
+        </p:nvSpPr>
+        <p:spPr>
+          <a:xfrm>
+            <a:off x="5943600" y="4895850"/>
+            <a:ext cx="6362700" cy="647700"/>
           </a:xfrm>
           <a:prstGeom prst="roundRect">
             <a:avLst>
@@ -8645,14 +8866,14 @@
       </p:sp>
       <p:sp>
         <p:nvSpPr>
-          <p:cNvPr id="29" name="TextBox 28"/>
-          <p:cNvSpPr txBox="1"/>
-          <p:nvPr/>
-        </p:nvSpPr>
-        <p:spPr>
-          <a:xfrm>
-            <a:off x="6358890" y="4895850"/>
-            <a:ext cx="6652260" cy="647700"/>
+          <p:cNvPr id="35" name="TextBox 34"/>
+          <p:cNvSpPr txBox="1"/>
+          <p:nvPr/>
+        </p:nvSpPr>
+        <p:spPr>
+          <a:xfrm>
+            <a:off x="6038850" y="4895850"/>
+            <a:ext cx="6172200" cy="647700"/>
           </a:xfrm>
           <a:prstGeom prst="rect">
             <a:avLst/>
@@ -8686,14 +8907,14 @@
       </p:sp>
       <p:sp>
         <p:nvSpPr>
-          <p:cNvPr id="30" name="Rounded Rectangle 29"/>
-          <p:cNvSpPr/>
-          <p:nvPr/>
-        </p:nvSpPr>
-        <p:spPr>
-          <a:xfrm>
-            <a:off x="13144500" y="4895850"/>
-            <a:ext cx="4000500" cy="647700"/>
+          <p:cNvPr id="36" name="Rounded Rectangle 35"/>
+          <p:cNvSpPr/>
+          <p:nvPr/>
+        </p:nvSpPr>
+        <p:spPr>
+          <a:xfrm>
+            <a:off x="12344400" y="4895850"/>
+            <a:ext cx="2362200" cy="647700"/>
           </a:xfrm>
           <a:prstGeom prst="roundRect">
             <a:avLst>
@@ -8720,14 +8941,14 @@
       </p:sp>
       <p:sp>
         <p:nvSpPr>
-          <p:cNvPr id="31" name="TextBox 30"/>
-          <p:cNvSpPr txBox="1"/>
-          <p:nvPr/>
-        </p:nvSpPr>
-        <p:spPr>
-          <a:xfrm>
-            <a:off x="13239750" y="4895850"/>
-            <a:ext cx="3810000" cy="647700"/>
+          <p:cNvPr id="37" name="TextBox 36"/>
+          <p:cNvSpPr txBox="1"/>
+          <p:nvPr/>
+        </p:nvSpPr>
+        <p:spPr>
+          <a:xfrm>
+            <a:off x="12439650" y="4895850"/>
+            <a:ext cx="2171700" cy="647700"/>
           </a:xfrm>
           <a:prstGeom prst="rect">
             <a:avLst/>
@@ -8754,21 +8975,21 @@
                 <a:ea typeface="Pretendard"/>
                 <a:cs typeface="Pretendard"/>
               </a:rPr>
-              <a:t>0</a:t>
-            </a:r>
-          </a:p>
-        </p:txBody>
-      </p:sp>
-      <p:sp>
-        <p:nvSpPr>
-          <p:cNvPr id="32" name="Rounded Rectangle 31"/>
-          <p:cNvSpPr/>
-          <p:nvPr/>
-        </p:nvSpPr>
-        <p:spPr>
-          <a:xfrm>
-            <a:off x="1143000" y="5619750"/>
-            <a:ext cx="5082540" cy="647700"/>
+              <a:t>30</a:t>
+            </a:r>
+          </a:p>
+        </p:txBody>
+      </p:sp>
+      <p:sp>
+        <p:nvSpPr>
+          <p:cNvPr id="38" name="Rounded Rectangle 37"/>
+          <p:cNvSpPr/>
+          <p:nvPr/>
+        </p:nvSpPr>
+        <p:spPr>
+          <a:xfrm>
+            <a:off x="14744700" y="4895850"/>
+            <a:ext cx="2400300" cy="647700"/>
           </a:xfrm>
           <a:prstGeom prst="roundRect">
             <a:avLst>
@@ -8776,6 +8997,81 @@
             </a:avLst>
           </a:prstGeom>
           <a:solidFill>
+            <a:srgbClr val="FAFBFD"/>
+          </a:solidFill>
+          <a:ln w="9525">
+            <a:solidFill>
+              <a:srgbClr val="DCE1E8"/>
+            </a:solidFill>
+          </a:ln>
+          <a:effectLst/>
+        </p:spPr>
+        <p:txBody>
+          <a:bodyPr rtlCol="0" anchor="ctr" wrap="square"/>
+          <a:lstStyle/>
+          <a:p>
+            <a:pPr algn="ctr"/>
+          </a:p>
+        </p:txBody>
+      </p:sp>
+      <p:sp>
+        <p:nvSpPr>
+          <p:cNvPr id="39" name="TextBox 38"/>
+          <p:cNvSpPr txBox="1"/>
+          <p:nvPr/>
+        </p:nvSpPr>
+        <p:spPr>
+          <a:xfrm>
+            <a:off x="14839950" y="4895850"/>
+            <a:ext cx="2209800" cy="647700"/>
+          </a:xfrm>
+          <a:prstGeom prst="rect">
+            <a:avLst/>
+          </a:prstGeom>
+          <a:noFill/>
+        </p:spPr>
+        <p:txBody>
+          <a:bodyPr wrap="square" lIns="0" rIns="0" tIns="0" bIns="0" anchor="ctr">
+            <a:spAutoFit/>
+          </a:bodyPr>
+          <a:lstStyle/>
+          <a:p>
+            <a:pPr algn="ctr">
+              <a:lnSpc>
+                <a:spcPct val="115000"/>
+              </a:lnSpc>
+            </a:pPr>
+            <a:r>
+              <a:rPr sz="1875" b="0">
+                <a:solidFill>
+                  <a:srgbClr val="3D3D3D"/>
+                </a:solidFill>
+                <a:latin typeface="Pretendard"/>
+                <a:ea typeface="Pretendard"/>
+                <a:cs typeface="Pretendard"/>
+              </a:rPr>
+              <a:t>0</a:t>
+            </a:r>
+          </a:p>
+        </p:txBody>
+      </p:sp>
+      <p:sp>
+        <p:nvSpPr>
+          <p:cNvPr id="40" name="Rounded Rectangle 39"/>
+          <p:cNvSpPr/>
+          <p:nvPr/>
+        </p:nvSpPr>
+        <p:spPr>
+          <a:xfrm>
+            <a:off x="1143000" y="5619750"/>
+            <a:ext cx="4762500" cy="647700"/>
+          </a:xfrm>
+          <a:prstGeom prst="roundRect">
+            <a:avLst>
+              <a:gd name="adj" fmla="val 5882"/>
+            </a:avLst>
+          </a:prstGeom>
+          <a:solidFill>
             <a:srgbClr val="EDF3FD"/>
           </a:solidFill>
           <a:ln w="9525">
@@ -8795,14 +9091,14 @@
       </p:sp>
       <p:sp>
         <p:nvSpPr>
-          <p:cNvPr id="33" name="TextBox 32"/>
+          <p:cNvPr id="41" name="TextBox 40"/>
           <p:cNvSpPr txBox="1"/>
           <p:nvPr/>
         </p:nvSpPr>
         <p:spPr>
           <a:xfrm>
             <a:off x="1238250" y="5619750"/>
-            <a:ext cx="4892040" cy="647700"/>
+            <a:ext cx="4572000" cy="647700"/>
           </a:xfrm>
           <a:prstGeom prst="rect">
             <a:avLst/>
@@ -8836,14 +9132,14 @@
       </p:sp>
       <p:sp>
         <p:nvSpPr>
-          <p:cNvPr id="34" name="Rounded Rectangle 33"/>
-          <p:cNvSpPr/>
-          <p:nvPr/>
-        </p:nvSpPr>
-        <p:spPr>
-          <a:xfrm>
-            <a:off x="6263640" y="5619750"/>
-            <a:ext cx="6842760" cy="647700"/>
+          <p:cNvPr id="42" name="Rounded Rectangle 41"/>
+          <p:cNvSpPr/>
+          <p:nvPr/>
+        </p:nvSpPr>
+        <p:spPr>
+          <a:xfrm>
+            <a:off x="5943600" y="5619750"/>
+            <a:ext cx="6362700" cy="647700"/>
           </a:xfrm>
           <a:prstGeom prst="roundRect">
             <a:avLst>
@@ -8870,14 +9166,14 @@
       </p:sp>
       <p:sp>
         <p:nvSpPr>
-          <p:cNvPr id="35" name="TextBox 34"/>
-          <p:cNvSpPr txBox="1"/>
-          <p:nvPr/>
-        </p:nvSpPr>
-        <p:spPr>
-          <a:xfrm>
-            <a:off x="6358890" y="5619750"/>
-            <a:ext cx="6652260" cy="647700"/>
+          <p:cNvPr id="43" name="TextBox 42"/>
+          <p:cNvSpPr txBox="1"/>
+          <p:nvPr/>
+        </p:nvSpPr>
+        <p:spPr>
+          <a:xfrm>
+            <a:off x="6038850" y="5619750"/>
+            <a:ext cx="6172200" cy="647700"/>
           </a:xfrm>
           <a:prstGeom prst="rect">
             <a:avLst/>
@@ -8911,14 +9207,14 @@
       </p:sp>
       <p:sp>
         <p:nvSpPr>
-          <p:cNvPr id="36" name="Rounded Rectangle 35"/>
-          <p:cNvSpPr/>
-          <p:nvPr/>
-        </p:nvSpPr>
-        <p:spPr>
-          <a:xfrm>
-            <a:off x="13144500" y="5619750"/>
-            <a:ext cx="4000500" cy="647700"/>
+          <p:cNvPr id="44" name="Rounded Rectangle 43"/>
+          <p:cNvSpPr/>
+          <p:nvPr/>
+        </p:nvSpPr>
+        <p:spPr>
+          <a:xfrm>
+            <a:off x="12344400" y="5619750"/>
+            <a:ext cx="2362200" cy="647700"/>
           </a:xfrm>
           <a:prstGeom prst="roundRect">
             <a:avLst>
@@ -8945,14 +9241,14 @@
       </p:sp>
       <p:sp>
         <p:nvSpPr>
-          <p:cNvPr id="37" name="TextBox 36"/>
-          <p:cNvSpPr txBox="1"/>
-          <p:nvPr/>
-        </p:nvSpPr>
-        <p:spPr>
-          <a:xfrm>
-            <a:off x="13239750" y="5619750"/>
-            <a:ext cx="3810000" cy="647700"/>
+          <p:cNvPr id="45" name="TextBox 44"/>
+          <p:cNvSpPr txBox="1"/>
+          <p:nvPr/>
+        </p:nvSpPr>
+        <p:spPr>
+          <a:xfrm>
+            <a:off x="12439650" y="5619750"/>
+            <a:ext cx="2171700" cy="647700"/>
           </a:xfrm>
           <a:prstGeom prst="rect">
             <a:avLst/>
@@ -8979,21 +9275,21 @@
                 <a:ea typeface="Pretendard"/>
                 <a:cs typeface="Pretendard"/>
               </a:rPr>
-              <a:t>0.0</a:t>
-            </a:r>
-          </a:p>
-        </p:txBody>
-      </p:sp>
-      <p:sp>
-        <p:nvSpPr>
-          <p:cNvPr id="38" name="Rounded Rectangle 37"/>
-          <p:cNvSpPr/>
-          <p:nvPr/>
-        </p:nvSpPr>
-        <p:spPr>
-          <a:xfrm>
-            <a:off x="1143000" y="6343650"/>
-            <a:ext cx="5082540" cy="647700"/>
+              <a:t>2.96</a:t>
+            </a:r>
+          </a:p>
+        </p:txBody>
+      </p:sp>
+      <p:sp>
+        <p:nvSpPr>
+          <p:cNvPr id="46" name="Rounded Rectangle 45"/>
+          <p:cNvSpPr/>
+          <p:nvPr/>
+        </p:nvSpPr>
+        <p:spPr>
+          <a:xfrm>
+            <a:off x="14744700" y="5619750"/>
+            <a:ext cx="2400300" cy="647700"/>
           </a:xfrm>
           <a:prstGeom prst="roundRect">
             <a:avLst>
@@ -9001,6 +9297,81 @@
             </a:avLst>
           </a:prstGeom>
           <a:solidFill>
+            <a:srgbClr val="FAFBFD"/>
+          </a:solidFill>
+          <a:ln w="9525">
+            <a:solidFill>
+              <a:srgbClr val="DCE1E8"/>
+            </a:solidFill>
+          </a:ln>
+          <a:effectLst/>
+        </p:spPr>
+        <p:txBody>
+          <a:bodyPr rtlCol="0" anchor="ctr" wrap="square"/>
+          <a:lstStyle/>
+          <a:p>
+            <a:pPr algn="ctr"/>
+          </a:p>
+        </p:txBody>
+      </p:sp>
+      <p:sp>
+        <p:nvSpPr>
+          <p:cNvPr id="47" name="TextBox 46"/>
+          <p:cNvSpPr txBox="1"/>
+          <p:nvPr/>
+        </p:nvSpPr>
+        <p:spPr>
+          <a:xfrm>
+            <a:off x="14839950" y="5619750"/>
+            <a:ext cx="2209800" cy="647700"/>
+          </a:xfrm>
+          <a:prstGeom prst="rect">
+            <a:avLst/>
+          </a:prstGeom>
+          <a:noFill/>
+        </p:spPr>
+        <p:txBody>
+          <a:bodyPr wrap="square" lIns="0" rIns="0" tIns="0" bIns="0" anchor="ctr">
+            <a:spAutoFit/>
+          </a:bodyPr>
+          <a:lstStyle/>
+          <a:p>
+            <a:pPr algn="ctr">
+              <a:lnSpc>
+                <a:spcPct val="115000"/>
+              </a:lnSpc>
+            </a:pPr>
+            <a:r>
+              <a:rPr sz="1875" b="0">
+                <a:solidFill>
+                  <a:srgbClr val="3D3D3D"/>
+                </a:solidFill>
+                <a:latin typeface="Pretendard"/>
+                <a:ea typeface="Pretendard"/>
+                <a:cs typeface="Pretendard"/>
+              </a:rPr>
+              <a:t>0.00</a:t>
+            </a:r>
+          </a:p>
+        </p:txBody>
+      </p:sp>
+      <p:sp>
+        <p:nvSpPr>
+          <p:cNvPr id="48" name="Rounded Rectangle 47"/>
+          <p:cNvSpPr/>
+          <p:nvPr/>
+        </p:nvSpPr>
+        <p:spPr>
+          <a:xfrm>
+            <a:off x="1143000" y="6343650"/>
+            <a:ext cx="4762500" cy="647700"/>
+          </a:xfrm>
+          <a:prstGeom prst="roundRect">
+            <a:avLst>
+              <a:gd name="adj" fmla="val 5882"/>
+            </a:avLst>
+          </a:prstGeom>
+          <a:solidFill>
             <a:srgbClr val="EDF3FD"/>
           </a:solidFill>
           <a:ln w="9525">
@@ -9020,14 +9391,14 @@
       </p:sp>
       <p:sp>
         <p:nvSpPr>
-          <p:cNvPr id="39" name="TextBox 38"/>
+          <p:cNvPr id="49" name="TextBox 48"/>
           <p:cNvSpPr txBox="1"/>
           <p:nvPr/>
         </p:nvSpPr>
         <p:spPr>
           <a:xfrm>
             <a:off x="1238250" y="6343650"/>
-            <a:ext cx="4892040" cy="647700"/>
+            <a:ext cx="4572000" cy="647700"/>
           </a:xfrm>
           <a:prstGeom prst="rect">
             <a:avLst/>
@@ -9061,14 +9432,14 @@
       </p:sp>
       <p:sp>
         <p:nvSpPr>
-          <p:cNvPr id="40" name="Rounded Rectangle 39"/>
-          <p:cNvSpPr/>
-          <p:nvPr/>
-        </p:nvSpPr>
-        <p:spPr>
-          <a:xfrm>
-            <a:off x="6263640" y="6343650"/>
-            <a:ext cx="6842760" cy="647700"/>
+          <p:cNvPr id="50" name="Rounded Rectangle 49"/>
+          <p:cNvSpPr/>
+          <p:nvPr/>
+        </p:nvSpPr>
+        <p:spPr>
+          <a:xfrm>
+            <a:off x="5943600" y="6343650"/>
+            <a:ext cx="6362700" cy="647700"/>
           </a:xfrm>
           <a:prstGeom prst="roundRect">
             <a:avLst>
@@ -9095,14 +9466,14 @@
       </p:sp>
       <p:sp>
         <p:nvSpPr>
-          <p:cNvPr id="41" name="TextBox 40"/>
-          <p:cNvSpPr txBox="1"/>
-          <p:nvPr/>
-        </p:nvSpPr>
-        <p:spPr>
-          <a:xfrm>
-            <a:off x="6358890" y="6343650"/>
-            <a:ext cx="6652260" cy="647700"/>
+          <p:cNvPr id="51" name="TextBox 50"/>
+          <p:cNvSpPr txBox="1"/>
+          <p:nvPr/>
+        </p:nvSpPr>
+        <p:spPr>
+          <a:xfrm>
+            <a:off x="6038850" y="6343650"/>
+            <a:ext cx="6172200" cy="647700"/>
           </a:xfrm>
           <a:prstGeom prst="rect">
             <a:avLst/>
@@ -9136,14 +9507,14 @@
       </p:sp>
       <p:sp>
         <p:nvSpPr>
-          <p:cNvPr id="42" name="Rounded Rectangle 41"/>
-          <p:cNvSpPr/>
-          <p:nvPr/>
-        </p:nvSpPr>
-        <p:spPr>
-          <a:xfrm>
-            <a:off x="13144500" y="6343650"/>
-            <a:ext cx="4000500" cy="647700"/>
+          <p:cNvPr id="52" name="Rounded Rectangle 51"/>
+          <p:cNvSpPr/>
+          <p:nvPr/>
+        </p:nvSpPr>
+        <p:spPr>
+          <a:xfrm>
+            <a:off x="12344400" y="6343650"/>
+            <a:ext cx="2362200" cy="647700"/>
           </a:xfrm>
           <a:prstGeom prst="roundRect">
             <a:avLst>
@@ -9170,14 +9541,14 @@
       </p:sp>
       <p:sp>
         <p:nvSpPr>
-          <p:cNvPr id="43" name="TextBox 42"/>
-          <p:cNvSpPr txBox="1"/>
-          <p:nvPr/>
-        </p:nvSpPr>
-        <p:spPr>
-          <a:xfrm>
-            <a:off x="13239750" y="6343650"/>
-            <a:ext cx="3810000" cy="647700"/>
+          <p:cNvPr id="53" name="TextBox 52"/>
+          <p:cNvSpPr txBox="1"/>
+          <p:nvPr/>
+        </p:nvSpPr>
+        <p:spPr>
+          <a:xfrm>
+            <a:off x="12439650" y="6343650"/>
+            <a:ext cx="2171700" cy="647700"/>
           </a:xfrm>
           <a:prstGeom prst="rect">
             <a:avLst/>
@@ -9204,6 +9575,81 @@
                 <a:ea typeface="Pretendard"/>
                 <a:cs typeface="Pretendard"/>
               </a:rPr>
+              <a:t>5</a:t>
+            </a:r>
+          </a:p>
+        </p:txBody>
+      </p:sp>
+      <p:sp>
+        <p:nvSpPr>
+          <p:cNvPr id="54" name="Rounded Rectangle 53"/>
+          <p:cNvSpPr/>
+          <p:nvPr/>
+        </p:nvSpPr>
+        <p:spPr>
+          <a:xfrm>
+            <a:off x="14744700" y="6343650"/>
+            <a:ext cx="2400300" cy="647700"/>
+          </a:xfrm>
+          <a:prstGeom prst="roundRect">
+            <a:avLst>
+              <a:gd name="adj" fmla="val 5882"/>
+            </a:avLst>
+          </a:prstGeom>
+          <a:solidFill>
+            <a:srgbClr val="FAFBFD"/>
+          </a:solidFill>
+          <a:ln w="9525">
+            <a:solidFill>
+              <a:srgbClr val="DCE1E8"/>
+            </a:solidFill>
+          </a:ln>
+          <a:effectLst/>
+        </p:spPr>
+        <p:txBody>
+          <a:bodyPr rtlCol="0" anchor="ctr" wrap="square"/>
+          <a:lstStyle/>
+          <a:p>
+            <a:pPr algn="ctr"/>
+          </a:p>
+        </p:txBody>
+      </p:sp>
+      <p:sp>
+        <p:nvSpPr>
+          <p:cNvPr id="55" name="TextBox 54"/>
+          <p:cNvSpPr txBox="1"/>
+          <p:nvPr/>
+        </p:nvSpPr>
+        <p:spPr>
+          <a:xfrm>
+            <a:off x="14839950" y="6343650"/>
+            <a:ext cx="2209800" cy="647700"/>
+          </a:xfrm>
+          <a:prstGeom prst="rect">
+            <a:avLst/>
+          </a:prstGeom>
+          <a:noFill/>
+        </p:spPr>
+        <p:txBody>
+          <a:bodyPr wrap="square" lIns="0" rIns="0" tIns="0" bIns="0" anchor="ctr">
+            <a:spAutoFit/>
+          </a:bodyPr>
+          <a:lstStyle/>
+          <a:p>
+            <a:pPr algn="ctr">
+              <a:lnSpc>
+                <a:spcPct val="115000"/>
+              </a:lnSpc>
+            </a:pPr>
+            <a:r>
+              <a:rPr sz="1875" b="0">
+                <a:solidFill>
+                  <a:srgbClr val="3D3D3D"/>
+                </a:solidFill>
+                <a:latin typeface="Pretendard"/>
+                <a:ea typeface="Pretendard"/>
+                <a:cs typeface="Pretendard"/>
+              </a:rPr>
               <a:t>4</a:t>
             </a:r>
           </a:p>
@@ -9211,7 +9657,7 @@
       </p:sp>
       <p:sp>
         <p:nvSpPr>
-          <p:cNvPr id="44" name="TextBox 43"/>
+          <p:cNvPr id="56" name="TextBox 55"/>
           <p:cNvSpPr txBox="1"/>
           <p:nvPr/>
         </p:nvSpPr>
@@ -9245,14 +9691,14 @@
                 <a:ea typeface="Pretendard"/>
                 <a:cs typeface="Pretendard"/>
               </a:rPr>
-              <a:t>before 행은 앞 실습 1단계의 기준선과 같은 수치 — raw = pd.read_csv('orders.csv') 로 새로 읽고, 두 프로파일을 concat 해 quality_report.csv 로</a:t>
-            </a:r>
-          </a:p>
-        </p:txBody>
-      </p:sp>
-      <p:sp>
-        <p:nvSpPr>
-          <p:cNvPr id="45" name="Rectangle 44"/>
+              <a:t>before 는 raw = pd.read_csv('orders.csv') 로 새로 읽는다 — 앞 실습 1단계 기준선과 같은 수치. 두 프로파일을 concat 해 quality_report.csv 로</a:t>
+            </a:r>
+          </a:p>
+        </p:txBody>
+      </p:sp>
+      <p:sp>
+        <p:nvSpPr>
+          <p:cNvPr id="57" name="Rectangle 56"/>
           <p:cNvSpPr/>
           <p:nvPr/>
         </p:nvSpPr>
@@ -9282,7 +9728,7 @@
       </p:sp>
       <p:sp>
         <p:nvSpPr>
-          <p:cNvPr id="46" name="TextBox 45"/>
+          <p:cNvPr id="58" name="TextBox 57"/>
           <p:cNvSpPr txBox="1"/>
           <p:nvPr/>
         </p:nvSpPr>
@@ -9323,7 +9769,7 @@
       </p:sp>
       <p:sp>
         <p:nvSpPr>
-          <p:cNvPr id="47" name="TextBox 46"/>
+          <p:cNvPr id="59" name="TextBox 58"/>
           <p:cNvSpPr txBox="1"/>
           <p:nvPr/>
         </p:nvSpPr>
@@ -9382,7 +9828,7 @@
       <p:grpSpPr/>
       <p:sp>
         <p:nvSpPr>
-          <p:cNvPr id="2" name="Oval 1"/>
+          <p:cNvPr id="2" name="deckgen:decor"/>
           <p:cNvSpPr/>
           <p:nvPr/>
         </p:nvSpPr>
@@ -9412,7 +9858,7 @@
       </p:sp>
       <p:sp>
         <p:nvSpPr>
-          <p:cNvPr id="3" name="Oval 2"/>
+          <p:cNvPr id="3" name="deckgen:decor"/>
           <p:cNvSpPr/>
           <p:nvPr/>
         </p:nvSpPr>
@@ -9442,7 +9888,7 @@
       </p:sp>
       <p:sp>
         <p:nvSpPr>
-          <p:cNvPr id="4" name="Oval 3"/>
+          <p:cNvPr id="4" name="deckgen:decor"/>
           <p:cNvSpPr/>
           <p:nvPr/>
         </p:nvSpPr>
@@ -11013,7 +11459,7 @@
       <p:grpSpPr/>
       <p:sp>
         <p:nvSpPr>
-          <p:cNvPr id="2" name="Oval 1"/>
+          <p:cNvPr id="2" name="deckgen:decor"/>
           <p:cNvSpPr/>
           <p:nvPr/>
         </p:nvSpPr>
@@ -11043,7 +11489,7 @@
       </p:sp>
       <p:sp>
         <p:nvSpPr>
-          <p:cNvPr id="3" name="Oval 2"/>
+          <p:cNvPr id="3" name="deckgen:decor"/>
           <p:cNvSpPr/>
           <p:nvPr/>
         </p:nvSpPr>
@@ -11073,7 +11519,7 @@
       </p:sp>
       <p:sp>
         <p:nvSpPr>
-          <p:cNvPr id="4" name="Oval 3"/>
+          <p:cNvPr id="4" name="deckgen:decor"/>
           <p:cNvSpPr/>
           <p:nvPr/>
         </p:nvSpPr>
@@ -11354,7 +11800,7 @@
                 <a:ea typeface="Pretendard"/>
                 <a:cs typeface="Pretendard"/>
               </a:rPr>
-              <a:t>개선율 네 줄</a:t>
+              <a:t>python3 improve.py — 개선율 네 줄</a:t>
             </a:r>
           </a:p>
         </p:txBody>
@@ -11395,7 +11841,7 @@
                 <a:ea typeface="Pretendard"/>
                 <a:cs typeface="Pretendard"/>
               </a:rPr>
-              <a:t>중복 15 -&gt; 0 · 결측 30+ -&gt; 0 · 카테고리 5 -&gt; 4 · 행 수 -1.5% 안팎</a:t>
+              <a:t>중복 15 -&gt; 0 · 결측 30 -&gt; 0 · 카테고리 5 -&gt; 4 · 1015 -&gt; 1000 (-1.5%)</a:t>
             </a:r>
           </a:p>
         </p:txBody>
@@ -11541,7 +11987,7 @@
                 <a:ea typeface="Pretendard"/>
                 <a:cs typeface="Pretendard"/>
               </a:rPr>
-              <a:t>DuckDB 로 교차 검증</a:t>
+              <a:t>python3 crosscheck.py — DuckDB 로</a:t>
             </a:r>
           </a:p>
         </p:txBody>
@@ -11582,7 +12028,7 @@
                 <a:ea typeface="Pretendard"/>
                 <a:cs typeface="Pretendard"/>
               </a:rPr>
-              <a:t>orders_clean.parquet 를 count(*)·count(DISTINCT …)·min/max(order_date) 로</a:t>
+              <a:t>orders_clean.parquet 를 count(*)·count(DISTINCT …)·min/max(order_date)</a:t>
             </a:r>
           </a:p>
         </p:txBody>
@@ -11974,7 +12420,7 @@
                 <a:ea typeface="Pretendard"/>
                 <a:cs typeface="Pretendard"/>
               </a:rPr>
-              <a:t>날짜 범위는 2026-06-01 부터 두 달 안쪽이면 통과 — 만든 도구(Pandas)와 다른 도구(DuckDB)로 재면 검증의 신뢰가 올라간다. 개선율 수치는 리포트 문서에 그대로 옮겨 적는다</a:t>
+              <a:t>날짜 범위 2026-06-01 ~ 2026-07-30 (00:00:00 이 붙은 TIMESTAMP) — Pandas 의 after 와 숫자가 같으면 통과. 개선율은 리포트 문서에 그대로 옮긴다</a:t>
             </a:r>
           </a:p>
         </p:txBody>
@@ -12111,7 +12557,7 @@
       <p:grpSpPr/>
       <p:sp>
         <p:nvSpPr>
-          <p:cNvPr id="2" name="Oval 1"/>
+          <p:cNvPr id="2" name="deckgen:decor"/>
           <p:cNvSpPr/>
           <p:nvPr/>
         </p:nvSpPr>
@@ -12141,7 +12587,7 @@
       </p:sp>
       <p:sp>
         <p:nvSpPr>
-          <p:cNvPr id="3" name="Oval 2"/>
+          <p:cNvPr id="3" name="deckgen:decor"/>
           <p:cNvSpPr/>
           <p:nvPr/>
         </p:nvSpPr>
@@ -12171,7 +12617,7 @@
       </p:sp>
       <p:sp>
         <p:nvSpPr>
-          <p:cNvPr id="4" name="Oval 3"/>
+          <p:cNvPr id="4" name="deckgen:decor"/>
           <p:cNvSpPr/>
           <p:nvPr/>
         </p:nvSpPr>
@@ -12276,7 +12722,7 @@
                 <a:ea typeface="Pretendard"/>
                 <a:cs typeface="Pretendard"/>
               </a:rPr>
-              <a:t>리포트 문서 — 여섯 절</a:t>
+              <a:t>quality_report.md — 편집기로 여섯 절</a:t>
             </a:r>
           </a:p>
         </p:txBody>
@@ -13526,7 +13972,7 @@
       <p:grpSpPr/>
       <p:sp>
         <p:nvSpPr>
-          <p:cNvPr id="2" name="Oval 1"/>
+          <p:cNvPr id="2" name="deckgen:decor"/>
           <p:cNvSpPr/>
           <p:nvPr/>
         </p:nvSpPr>
@@ -13556,7 +14002,7 @@
       </p:sp>
       <p:sp>
         <p:nvSpPr>
-          <p:cNvPr id="3" name="Oval 2"/>
+          <p:cNvPr id="3" name="deckgen:decor"/>
           <p:cNvSpPr/>
           <p:nvPr/>
         </p:nvSpPr>
@@ -13586,7 +14032,7 @@
       </p:sp>
       <p:sp>
         <p:nvSpPr>
-          <p:cNvPr id="4" name="Oval 3"/>
+          <p:cNvPr id="4" name="deckgen:decor"/>
           <p:cNvSpPr/>
           <p:nvPr/>
         </p:nvSpPr>
@@ -13918,7 +14364,7 @@
                 <a:ea typeface="Pretendard"/>
                 <a:cs typeface="Pretendard"/>
               </a:rPr>
-              <a:t>지운 뒤 python3 clean_orders.py → python3 quality_report.py — ls -lh 로 다시 생겼는지</a:t>
+              <a:t>clean_orders.py → quality_report.py 로 다시 — parquet 19K · csv 113B</a:t>
             </a:r>
           </a:p>
         </p:txBody>
@@ -14115,7 +14561,7 @@
                 <a:ea typeface="Pretendard"/>
                 <a:cs typeface="Pretendard"/>
               </a:rPr>
-              <a:t>orders_clean.parquet · 품질 리포트(quality_report.csv + 문서) · clean_orders.py</a:t>
+              <a:t>orders_clean.parquet · quality_report.csv + md · clean_orders.py</a:t>
             </a:r>
           </a:p>
         </p:txBody>
@@ -14291,7 +14737,7 @@
                 <a:ea typeface="Pretendard"/>
                 <a:cs typeface="Pretendard"/>
               </a:rPr>
-              <a:t>어디에</a:t>
+              <a:t>「산출물 제출」 페이지</a:t>
             </a:r>
           </a:p>
           <a:p>
@@ -14312,7 +14758,7 @@
                 <a:ea typeface="Pretendard"/>
                 <a:cs typeface="Pretendard"/>
               </a:rPr>
-              <a:t>사이트의 「산출물 제출」 페이지 — 제출 후 주차별 산출물 갤러리에도 올려 동료와 공유</a:t>
+              <a:t>파일 칸은 없고 URL 칸 — GitHub 저장소나 드라이브 공유 주소</a:t>
             </a:r>
           </a:p>
         </p:txBody>
@@ -14488,7 +14934,7 @@
                 <a:ea typeface="Pretendard"/>
                 <a:cs typeface="Pretendard"/>
               </a:rPr>
-              <a:t>함께 올리면 좋은 것</a:t>
+              <a:t>패들릿 갤러리</a:t>
             </a:r>
           </a:p>
           <a:p>
@@ -14509,7 +14955,7 @@
                 <a:ea typeface="Pretendard"/>
                 <a:cs typeface="Pretendard"/>
               </a:rPr>
-              <a:t>3-3 에서 잰 CSV 대비 Parquet 크기·속도 실측표</a:t>
+              <a:t>week3 폴더를 .venv 빼고 이름_3주차.zip — 실측기록_3-3.md 도 함께</a:t>
             </a:r>
           </a:p>
         </p:txBody>
@@ -14580,7 +15026,7 @@
                 <a:ea typeface="Pretendard"/>
                 <a:cs typeface="Pretendard"/>
               </a:rPr>
-              <a:t>파일을 지우고 스크립트만으로 다시 만들어지면 재현성 검증 완료</a:t>
+              <a:t>마감 10-16(금) 23:59 — 그날 19~23시는 4-1 수업</a:t>
             </a:r>
           </a:p>
         </p:txBody>
@@ -14717,7 +15163,7 @@
       <p:grpSpPr/>
       <p:sp>
         <p:nvSpPr>
-          <p:cNvPr id="2" name="Oval 1"/>
+          <p:cNvPr id="2" name="deckgen:decor"/>
           <p:cNvSpPr/>
           <p:nvPr/>
         </p:nvSpPr>
@@ -14747,7 +15193,7 @@
       </p:sp>
       <p:sp>
         <p:nvSpPr>
-          <p:cNvPr id="3" name="Oval 2"/>
+          <p:cNvPr id="3" name="deckgen:decor"/>
           <p:cNvSpPr/>
           <p:nvPr/>
         </p:nvSpPr>
@@ -14777,7 +15223,7 @@
       </p:sp>
       <p:sp>
         <p:nvSpPr>
-          <p:cNvPr id="4" name="Oval 3"/>
+          <p:cNvPr id="4" name="deckgen:decor"/>
           <p:cNvSpPr/>
           <p:nvPr/>
         </p:nvSpPr>
@@ -14983,7 +15429,7 @@
       </p:sp>
       <p:sp>
         <p:nvSpPr>
-          <p:cNvPr id="10" name="TextBox 9"/>
+          <p:cNvPr id="10" name="deckgen:ornament"/>
           <p:cNvSpPr txBox="1"/>
           <p:nvPr/>
         </p:nvSpPr>
@@ -15168,7 +15614,7 @@
       </p:sp>
       <p:sp>
         <p:nvSpPr>
-          <p:cNvPr id="14" name="TextBox 13"/>
+          <p:cNvPr id="14" name="deckgen:ornament"/>
           <p:cNvSpPr txBox="1"/>
           <p:nvPr/>
         </p:nvSpPr>
@@ -15353,7 +15799,7 @@
       </p:sp>
       <p:sp>
         <p:nvSpPr>
-          <p:cNvPr id="18" name="TextBox 17"/>
+          <p:cNvPr id="18" name="deckgen:ornament"/>
           <p:cNvSpPr txBox="1"/>
           <p:nvPr/>
         </p:nvSpPr>

--- a/data-eng/decks/w3d5s3.pptx
+++ b/data-eng/decks/w3d5s3.pptx
@@ -6819,7 +6819,7 @@
                 <a:ea typeface="Pretendard"/>
                 <a:cs typeface="Pretendard"/>
               </a:rPr>
-              <a:t>1 리포트 CSV</a:t>
+              <a:t>1. 리포트 CSV</a:t>
             </a:r>
           </a:p>
         </p:txBody>
@@ -6983,7 +6983,7 @@
                 <a:ea typeface="Pretendard"/>
                 <a:cs typeface="Pretendard"/>
               </a:rPr>
-              <a:t>2 개선율</a:t>
+              <a:t>2. 개선율</a:t>
             </a:r>
           </a:p>
         </p:txBody>
@@ -7147,7 +7147,7 @@
                 <a:ea typeface="Pretendard"/>
                 <a:cs typeface="Pretendard"/>
               </a:rPr>
-              <a:t>3 교차 검증</a:t>
+              <a:t>3. 교차 검증</a:t>
             </a:r>
           </a:p>
         </p:txBody>
@@ -7311,7 +7311,7 @@
                 <a:ea typeface="Pretendard"/>
                 <a:cs typeface="Pretendard"/>
               </a:rPr>
-              <a:t>4 문서 작성</a:t>
+              <a:t>4. 문서 작성</a:t>
             </a:r>
           </a:p>
         </p:txBody>
@@ -7475,7 +7475,7 @@
                 <a:ea typeface="Pretendard"/>
                 <a:cs typeface="Pretendard"/>
               </a:rPr>
-              <a:t>5 점검·제출</a:t>
+              <a:t>5. 점검·제출</a:t>
             </a:r>
           </a:p>
         </p:txBody>
